--- a/Topic_E/Exam_Practice/TE-L09_Writing_Workshop_Comparing_Cultures_with_Respect.pptx
+++ b/Topic_E/Exam_Practice/TE-L09_Writing_Workshop_Comparing_Cultures_with_Respect.pptx
@@ -784,7 +784,11 @@
           <a:lstStyle/>
           <a:p>
             <a:r>
-              <a:rPr lang="en-US" dirty="0"/>
+              <a:rPr lang="ar-SA" dirty="0">
+                <a:latin typeface="Amiri" pitchFamily="2" charset="-78"/>
+                <a:ea typeface="Amiri" pitchFamily="2" charset="-78"/>
+                <a:cs typeface="Amiri" pitchFamily="2" charset="-78"/>
+              </a:rPr>
               <a:t>Q3 (3 min to choose and read). Title (أ) suits Core and Develop; title (ب) suits Stretch.</a:t>
             </a:r>
             <a:endParaRPr lang="en-US" dirty="0"/>
@@ -1403,7 +1407,11 @@
           <a:lstStyle/>
           <a:p>
             <a:r>
-              <a:rPr lang="en-US" dirty="0"/>
+              <a:rPr lang="ar-SA" dirty="0">
+                <a:latin typeface="Amiri" pitchFamily="2" charset="-78"/>
+                <a:ea typeface="Amiri" pitchFamily="2" charset="-78"/>
+                <a:cs typeface="Amiri" pitchFamily="2" charset="-78"/>
+              </a:rPr>
               <a:t>WELCOME (1 min) — while students join.
 • Greet each student by name as they arrive: السَّلَامُ عَلَيْكُمْ. Take the register (Pastoral Tracker: attendance 0/1).
 • 2-MINUTE CHECK-IN (SEND training): a private chat to any student who seemed unsettled last lesson — “Are you okay today? 👍 / 👎”.
@@ -1672,7 +1680,11 @@
           <a:lstStyle/>
           <a:p>
             <a:r>
-              <a:rPr lang="en-US" dirty="0"/>
+              <a:rPr lang="ar-SA" dirty="0">
+                <a:latin typeface="Amiri" pitchFamily="2" charset="-78"/>
+                <a:ea typeface="Amiri" pitchFamily="2" charset="-78"/>
+                <a:cs typeface="Amiri" pitchFamily="2" charset="-78"/>
+              </a:rPr>
               <a:t>QUESTION 1 — FORM FILLING. About 8 minutes. Core: boxes 1–6. Develop / Stretch: all 8. Box 7 takes a verbal noun (ḥubb). Box 8: two comparatives linked by baynamā. A girl writes صَدِيقَتِكِ / عِنْدَهَا in the headings.</a:t>
             </a:r>
             <a:endParaRPr lang="en-US" dirty="0"/>
@@ -1936,7 +1948,11 @@
           <a:lstStyle/>
           <a:p>
             <a:r>
-              <a:rPr lang="en-US" dirty="0"/>
+              <a:rPr lang="ar-SA" dirty="0">
+                <a:latin typeface="Amiri" pitchFamily="2" charset="-78"/>
+                <a:ea typeface="Amiri" pitchFamily="2" charset="-78"/>
+                <a:cs typeface="Amiri" pitchFamily="2" charset="-78"/>
+              </a:rPr>
               <a:t>Question words: قَارِنْ (compare! → أَكْثَرُ / أَبْكَرُ مِنْ · بَيْنَمَا) · صِفْ (describe!) · المَدْرَسَتَيْنِ (the two schools — dual) · خِطَطُكَ (plans — FUTURE).</a:t>
             </a:r>
             <a:endParaRPr lang="en-US" dirty="0"/>
@@ -2508,6 +2524,7 @@
                   <a:srgbClr val="D4AF37"/>
                 </a:solidFill>
                 <a:latin typeface="Amiri" pitchFamily="2" charset="-78"/>
+                <a:ea typeface="Amiri" pitchFamily="2" charset="-78"/>
                 <a:cs typeface="Amiri" pitchFamily="2" charset="-78"/>
               </a:rPr>
               <a:t>م</a:t>
@@ -2714,6 +2731,7 @@
                   <a:srgbClr val="D4AF37"/>
                 </a:solidFill>
                 <a:latin typeface="Amiri" pitchFamily="2" charset="-78"/>
+                <a:ea typeface="Amiri" pitchFamily="2" charset="-78"/>
                 <a:cs typeface="Amiri" pitchFamily="2" charset="-78"/>
               </a:rPr>
               <a:t>وَرْشَةُ الكِتَابَةِ — المُقَارَنَةُ بَيْنَ الثَّقَافَاتِ بِاحْتِرَامٍ</a:t>
@@ -3171,6 +3189,7 @@
                   <a:srgbClr val="D4AF37"/>
                 </a:solidFill>
                 <a:latin typeface="Amiri" pitchFamily="2" charset="-78"/>
+                <a:ea typeface="Amiri" pitchFamily="2" charset="-78"/>
                 <a:cs typeface="Amiri" pitchFamily="2" charset="-78"/>
               </a:rPr>
               <a:t>م</a:t>
@@ -3491,6 +3510,7 @@
                   <a:srgbClr val="8A6D1E"/>
                 </a:solidFill>
                 <a:latin typeface="Amiri" pitchFamily="2" charset="-78"/>
+                <a:ea typeface="Amiri" pitchFamily="2" charset="-78"/>
                 <a:cs typeface="Amiri" pitchFamily="2" charset="-78"/>
               </a:rPr>
               <a:t>نَمُوذَجُ الإِجَابَةِ</a:t>
@@ -3604,6 +3624,7 @@
                   <a:srgbClr val="1F2A37"/>
                 </a:solidFill>
                 <a:latin typeface="Amiri" pitchFamily="2" charset="-78"/>
+                <a:ea typeface="Amiri" pitchFamily="2" charset="-78"/>
                 <a:cs typeface="Amiri" pitchFamily="2" charset="-78"/>
               </a:rPr>
               <a:t>مَرْحَبًا يَا عَلِيُّ،</a:t>
@@ -3623,6 +3644,7 @@
                   <a:srgbClr val="1F2A37"/>
                 </a:solidFill>
                 <a:latin typeface="Amiri" pitchFamily="2" charset="-78"/>
+                <a:ea typeface="Amiri" pitchFamily="2" charset="-78"/>
                 <a:cs typeface="Amiri" pitchFamily="2" charset="-78"/>
               </a:rPr>
               <a:t>كَيْفَ حَالُكَ؟ شُكْرًا عَلَى رِسَالَتِكَ عَنْ مَدْرَسَتِكَ فِي الدَّوْحَةِ. مَدْرَسَتِي فِي مَانْشِسْتَرَ مُخْتَلِفَةٌ قَلِيلًا. يَبْدَأُ يَوْمِي فِي الثَّامِنَةِ وَالنِّصْفِ، بَيْنَمَا يَبْدَأُ يَوْمُكَ فِي السَّابِعَةِ، لِذٰلِكَ يَوْمُكَ أَبْكَرُ مِنْ يَوْمِي. عُطْلَتُنَا السَّبْتُ وَالأَحَدُ، أَمَّا عُطْلَتُكُمْ فَالجُمُعَةُ وَالسَّبْتُ. نَأْكُلُ الغَدَاءَ فِي المَدْرَسَةِ، وَهُوَ غَالِبًا سَنْدَوِيشٌ أَوْ بِيتْزَا. أَظُنُّ أَنَّ المَدْرَسَتَيْنِ مُخْتَلِفَتَانِ، لٰكِنْ لَيْسَتْ إِحْدَاهُمَا أَفْضَلَ مِنَ الأُخْرَى. فِي الصَّيْفِ سَأَزُورُ قَطَرَ إِنْ شَاءَ اللّٰهُ. وَأَنْتَ، مَاذَا تَأْكُلُ فِي المَدْرَسَةِ؟</a:t>
@@ -3642,6 +3664,7 @@
                   <a:srgbClr val="1F2A37"/>
                 </a:solidFill>
                 <a:latin typeface="Amiri" pitchFamily="2" charset="-78"/>
+                <a:ea typeface="Amiri" pitchFamily="2" charset="-78"/>
                 <a:cs typeface="Amiri" pitchFamily="2" charset="-78"/>
               </a:rPr>
               <a:t>مَعَ السَّلَامَةِ،</a:t>
@@ -3661,6 +3684,7 @@
                   <a:srgbClr val="1F2A37"/>
                 </a:solidFill>
                 <a:latin typeface="Amiri" pitchFamily="2" charset="-78"/>
+                <a:ea typeface="Amiri" pitchFamily="2" charset="-78"/>
                 <a:cs typeface="Amiri" pitchFamily="2" charset="-78"/>
               </a:rPr>
               <a:t>حَمْزَةُ</a:t>
@@ -3824,11 +3848,12 @@
               <a:buNone/>
             </a:pPr>
             <a:r>
-              <a:rPr lang="en-US" sz="950" b="1" dirty="0">
+              <a:rPr lang="ar-SA" sz="950" b="1" dirty="0">
                 <a:solidFill>
                   <a:srgbClr val="FFFFFF"/>
                 </a:solidFill>
                 <a:latin typeface="Calibri" pitchFamily="34" charset="0"/>
+                <a:ea typeface="Amiri" pitchFamily="2" charset="-78"/>
                 <a:cs typeface="Amiri" pitchFamily="2" charset="-78"/>
               </a:rPr>
               <a:t>بَيْنَمَا يَبْدَأُ</a:t>
@@ -3889,11 +3914,12 @@
               <a:buNone/>
             </a:pPr>
             <a:r>
-              <a:rPr lang="en-US" sz="950" b="1" dirty="0">
+              <a:rPr lang="ar-SA" sz="950" b="1" dirty="0">
                 <a:solidFill>
                   <a:srgbClr val="FFFFFF"/>
                 </a:solidFill>
                 <a:latin typeface="Calibri" pitchFamily="34" charset="0"/>
+                <a:ea typeface="Amiri" pitchFamily="2" charset="-78"/>
                 <a:cs typeface="Amiri" pitchFamily="2" charset="-78"/>
               </a:rPr>
               <a:t>أَبْكَرُ مِنْ</a:t>
@@ -3954,11 +3980,12 @@
               <a:buNone/>
             </a:pPr>
             <a:r>
-              <a:rPr lang="en-US" sz="950" b="1" dirty="0">
+              <a:rPr lang="ar-SA" sz="950" b="1" dirty="0">
                 <a:solidFill>
                   <a:srgbClr val="FFFFFF"/>
                 </a:solidFill>
                 <a:latin typeface="Calibri" pitchFamily="34" charset="0"/>
+                <a:ea typeface="Amiri" pitchFamily="2" charset="-78"/>
                 <a:cs typeface="Amiri" pitchFamily="2" charset="-78"/>
               </a:rPr>
               <a:t>أَمَّا عُطْلَتُكُمْ فَالجُمُعَةُ</a:t>
@@ -4019,11 +4046,12 @@
               <a:buNone/>
             </a:pPr>
             <a:r>
-              <a:rPr lang="en-US" sz="950" b="1" dirty="0">
+              <a:rPr lang="ar-SA" sz="950" b="1" dirty="0">
                 <a:solidFill>
                   <a:srgbClr val="FFFFFF"/>
                 </a:solidFill>
                 <a:latin typeface="Calibri" pitchFamily="34" charset="0"/>
+                <a:ea typeface="Amiri" pitchFamily="2" charset="-78"/>
                 <a:cs typeface="Amiri" pitchFamily="2" charset="-78"/>
               </a:rPr>
               <a:t>لَيْسَتْ إِحْدَاهُمَا أَفْضَلَ</a:t>
@@ -4157,6 +4185,7 @@
                   <a:srgbClr val="D4AF37"/>
                 </a:solidFill>
                 <a:latin typeface="Amiri" pitchFamily="2" charset="-78"/>
+                <a:ea typeface="Amiri" pitchFamily="2" charset="-78"/>
                 <a:cs typeface="Amiri" pitchFamily="2" charset="-78"/>
               </a:rPr>
               <a:t>م</a:t>
@@ -4477,6 +4506,7 @@
                   <a:srgbClr val="8A6D1E"/>
                 </a:solidFill>
                 <a:latin typeface="Amiri" pitchFamily="2" charset="-78"/>
+                <a:ea typeface="Amiri" pitchFamily="2" charset="-78"/>
                 <a:cs typeface="Amiri" pitchFamily="2" charset="-78"/>
               </a:rPr>
               <a:t>نَمُوذَجُ الإِجَابَةِ</a:t>
@@ -4590,6 +4620,7 @@
                   <a:srgbClr val="1F2A37"/>
                 </a:solidFill>
                 <a:latin typeface="Amiri" pitchFamily="2" charset="-78"/>
+                <a:ea typeface="Amiri" pitchFamily="2" charset="-78"/>
                 <a:cs typeface="Amiri" pitchFamily="2" charset="-78"/>
               </a:rPr>
               <a:t>عَزِيزِي عَلِيُّ،</a:t>
@@ -4609,6 +4640,7 @@
                   <a:srgbClr val="1F2A37"/>
                 </a:solidFill>
                 <a:latin typeface="Amiri" pitchFamily="2" charset="-78"/>
+                <a:ea typeface="Amiri" pitchFamily="2" charset="-78"/>
                 <a:cs typeface="Amiri" pitchFamily="2" charset="-78"/>
               </a:rPr>
               <a:t>قَرَأْتُ رِسَالَتَكَ بِاهْتِمَامٍ، وَلَاحَظْتُ أَنَّ أُسْبُوعَيْنَا الدِّرَاسِيَّيْنِ يَخْتَلِفَانِ فِي أَشْيَاءَ كَثِيرَةٍ. فَيَوْمُكَ يَبْدَأُ فِي السَّابِعَةِ لِتَتَجَنَّبُوا حَرَّ الظُّهْرِ، بَيْنَمَا يَبْدَأُ يَوْمِي فِي الثَّامِنَةِ وَالنِّصْفِ، وَيَنْتَهِي مُتَأَخِّرًا لِأَنَّنَا نَبْقَى لِلنَّوَادِي. أَمَّا العُطْلَةُ، فَعُطْلَتُكُمُ الجُمُعَةُ وَالسَّبْتُ لِأَنَّ الجُمُعَةَ يَوْمُ الصَّلَاةِ الجَامِعَةِ، وَعُطْلَتُنَا السَّبْتُ وَالأَحَدُ. وَأَكْثَرُ مَا أَعْجَبَنِي فِي مَدْرَسَتِكَ أَنَّ الطُّلَّابَ يُسَاعِدُونَ فِي تَنْظِيفِ الصَّفِّ، مِمَّا يُعَلِّمُ المَسْؤُولِيَّةَ. صَحِيحٌ أَنَّ النِّظَامَيْنِ مُخْتَلِفَانِ، غَيْرَ أَنَّ لِكُلٍّ مِنْهُمَا مَزَايَاهُ. وَإِذَا زُرْتُ الدَّوْحَةَ فِي الصَّيْفِ، فَهَلْ يُمْكِنُنِي أَنْ أَحْضُرَ يَوْمًا فِي مَدْرَسَتِكَ؟</a:t>
@@ -4628,6 +4660,7 @@
                   <a:srgbClr val="1F2A37"/>
                 </a:solidFill>
                 <a:latin typeface="Amiri" pitchFamily="2" charset="-78"/>
+                <a:ea typeface="Amiri" pitchFamily="2" charset="-78"/>
                 <a:cs typeface="Amiri" pitchFamily="2" charset="-78"/>
               </a:rPr>
               <a:t>مَعَ أَطْيَبِ التَّحِيَّاتِ،</a:t>
@@ -4647,6 +4680,7 @@
                   <a:srgbClr val="1F2A37"/>
                 </a:solidFill>
                 <a:latin typeface="Amiri" pitchFamily="2" charset="-78"/>
+                <a:ea typeface="Amiri" pitchFamily="2" charset="-78"/>
                 <a:cs typeface="Amiri" pitchFamily="2" charset="-78"/>
               </a:rPr>
               <a:t>حَمْزَةُ</a:t>
@@ -4810,11 +4844,12 @@
               <a:buNone/>
             </a:pPr>
             <a:r>
-              <a:rPr lang="en-US" sz="950" b="1" dirty="0">
+              <a:rPr lang="ar-SA" sz="950" b="1" dirty="0">
                 <a:solidFill>
                   <a:srgbClr val="FFFFFF"/>
                 </a:solidFill>
                 <a:latin typeface="Calibri" pitchFamily="34" charset="0"/>
+                <a:ea typeface="Amiri" pitchFamily="2" charset="-78"/>
                 <a:cs typeface="Amiri" pitchFamily="2" charset="-78"/>
               </a:rPr>
               <a:t>أُسْبُوعَيْنَا الدِّرَاسِيَّيْنِ يَخْتَلِفَانِ</a:t>
@@ -4875,11 +4910,12 @@
               <a:buNone/>
             </a:pPr>
             <a:r>
-              <a:rPr lang="en-US" sz="950" b="1" dirty="0">
+              <a:rPr lang="ar-SA" sz="950" b="1" dirty="0">
                 <a:solidFill>
                   <a:srgbClr val="FFFFFF"/>
                 </a:solidFill>
                 <a:latin typeface="Calibri" pitchFamily="34" charset="0"/>
+                <a:ea typeface="Amiri" pitchFamily="2" charset="-78"/>
                 <a:cs typeface="Amiri" pitchFamily="2" charset="-78"/>
               </a:rPr>
               <a:t>لِتَتَجَنَّبُوا … بَيْنَمَا</a:t>
@@ -4940,11 +4976,12 @@
               <a:buNone/>
             </a:pPr>
             <a:r>
-              <a:rPr lang="en-US" sz="950" b="1" dirty="0">
+              <a:rPr lang="ar-SA" sz="950" b="1" dirty="0">
                 <a:solidFill>
                   <a:srgbClr val="FFFFFF"/>
                 </a:solidFill>
                 <a:latin typeface="Calibri" pitchFamily="34" charset="0"/>
+                <a:ea typeface="Amiri" pitchFamily="2" charset="-78"/>
                 <a:cs typeface="Amiri" pitchFamily="2" charset="-78"/>
               </a:rPr>
               <a:t>مِمَّا يُعَلِّمُ</a:t>
@@ -5005,11 +5042,12 @@
               <a:buNone/>
             </a:pPr>
             <a:r>
-              <a:rPr lang="en-US" sz="950" b="1" dirty="0">
+              <a:rPr lang="ar-SA" sz="950" b="1" dirty="0">
                 <a:solidFill>
                   <a:srgbClr val="FFFFFF"/>
                 </a:solidFill>
                 <a:latin typeface="Calibri" pitchFamily="34" charset="0"/>
+                <a:ea typeface="Amiri" pitchFamily="2" charset="-78"/>
                 <a:cs typeface="Amiri" pitchFamily="2" charset="-78"/>
               </a:rPr>
               <a:t>لِكُلٍّ مِنْهُمَا مَزَايَاهُ</a:t>
@@ -5143,6 +5181,7 @@
                   <a:srgbClr val="D4AF37"/>
                 </a:solidFill>
                 <a:latin typeface="Amiri" pitchFamily="2" charset="-78"/>
+                <a:ea typeface="Amiri" pitchFamily="2" charset="-78"/>
                 <a:cs typeface="Amiri" pitchFamily="2" charset="-78"/>
               </a:rPr>
               <a:t>م</a:t>
@@ -5463,6 +5502,7 @@
                   <a:srgbClr val="8A6D1E"/>
                 </a:solidFill>
                 <a:latin typeface="Amiri" pitchFamily="2" charset="-78"/>
+                <a:ea typeface="Amiri" pitchFamily="2" charset="-78"/>
                 <a:cs typeface="Amiri" pitchFamily="2" charset="-78"/>
               </a:rPr>
               <a:t>اخْتَرْ عُنْوَانًا وَاحِدًا</a:t>
@@ -5743,6 +5783,7 @@
                   <a:srgbClr val="1B3B6F"/>
                 </a:solidFill>
                 <a:latin typeface="Amiri" pitchFamily="2" charset="-78"/>
+                <a:ea typeface="Amiri" pitchFamily="2" charset="-78"/>
                 <a:cs typeface="Amiri" pitchFamily="2" charset="-78"/>
               </a:rPr>
               <a:t>بَيْنَ ثَقَافَتَيْنِ: هُنَا وَهُنَاكَ</a:t>
@@ -5781,6 +5822,7 @@
                   <a:srgbClr val="1B3B6F"/>
                 </a:solidFill>
                 <a:latin typeface="Amiri" pitchFamily="2" charset="-78"/>
+                <a:ea typeface="Amiri" pitchFamily="2" charset="-78"/>
                 <a:cs typeface="Amiri" pitchFamily="2" charset="-78"/>
               </a:rPr>
               <a:t>(أ)</a:t>
@@ -5887,6 +5929,7 @@
                   <a:srgbClr val="1B3B6F"/>
                 </a:solidFill>
                 <a:latin typeface="Amiri" pitchFamily="2" charset="-78"/>
+                <a:ea typeface="Amiri" pitchFamily="2" charset="-78"/>
                 <a:cs typeface="Amiri" pitchFamily="2" charset="-78"/>
               </a:rPr>
               <a:t>مَنْ أَنْتَ وَمَا الثَّقَافَتَانِ · اخْتِلَافٌ فِي الحَيَاةِ اليَوْمِيَّةِ · اخْتِلَافٌ فِي العَائِلَةِ أَوِ الزِّيَارَاتِ · تَشَابُهٌ وَرَأْيُكَ وَخُطَطُكَ</a:t>
@@ -6018,6 +6061,7 @@
                   <a:srgbClr val="1B3B6F"/>
                 </a:solidFill>
                 <a:latin typeface="Amiri" pitchFamily="2" charset="-78"/>
+                <a:ea typeface="Amiri" pitchFamily="2" charset="-78"/>
                 <a:cs typeface="Amiri" pitchFamily="2" charset="-78"/>
               </a:rPr>
               <a:t>كَيْفَ نُقَارِنُ بَيْنَ الثَّقَافَاتِ دُونَ أَنْ نَحْكُمَ عَلَيْهَا؟</a:t>
@@ -6056,6 +6100,7 @@
                   <a:srgbClr val="1B3B6F"/>
                 </a:solidFill>
                 <a:latin typeface="Amiri" pitchFamily="2" charset="-78"/>
+                <a:ea typeface="Amiri" pitchFamily="2" charset="-78"/>
                 <a:cs typeface="Amiri" pitchFamily="2" charset="-78"/>
               </a:rPr>
               <a:t>(ب)</a:t>
@@ -6159,6 +6204,7 @@
                   <a:srgbClr val="1B3B6F"/>
                 </a:solidFill>
                 <a:latin typeface="Amiri" pitchFamily="2" charset="-78"/>
+                <a:ea typeface="Amiri" pitchFamily="2" charset="-78"/>
                 <a:cs typeface="Amiri" pitchFamily="2" charset="-78"/>
               </a:rPr>
               <a:t>المَوْضُوعُ · تَجَنُّبُ التَّعْمِيمِ وَالسُّؤَالُ عَنِ السَّبَبِ · مِثَالٌ مِنْ تَجْرِبَتِكَ · رَأْيُكَ</a:t>
@@ -6358,6 +6404,7 @@
                   <a:srgbClr val="D4AF37"/>
                 </a:solidFill>
                 <a:latin typeface="Amiri" pitchFamily="2" charset="-78"/>
+                <a:ea typeface="Amiri" pitchFamily="2" charset="-78"/>
                 <a:cs typeface="Amiri" pitchFamily="2" charset="-78"/>
               </a:rPr>
               <a:t>م</a:t>
@@ -6678,6 +6725,7 @@
                   <a:srgbClr val="8A6D1E"/>
                 </a:solidFill>
                 <a:latin typeface="Amiri" pitchFamily="2" charset="-78"/>
+                <a:ea typeface="Amiri" pitchFamily="2" charset="-78"/>
                 <a:cs typeface="Amiri" pitchFamily="2" charset="-78"/>
               </a:rPr>
               <a:t>خُطَّةُ الكِتَابَةِ</a:t>
@@ -7302,6 +7350,7 @@
                   <a:srgbClr val="1B3B6F"/>
                 </a:solidFill>
                 <a:latin typeface="Amiri" pitchFamily="2" charset="-78"/>
+                <a:ea typeface="Amiri" pitchFamily="2" charset="-78"/>
                 <a:cs typeface="Amiri" pitchFamily="2" charset="-78"/>
               </a:rPr>
               <a:t>الطَّقْسُ هُنَاكَ أَحَرُّ بِكَثِيرٍ مِنْ هُنَا.</a:t>
@@ -7401,6 +7450,7 @@
                   <a:srgbClr val="1B3B6F"/>
                 </a:solidFill>
                 <a:latin typeface="Amiri" pitchFamily="2" charset="-78"/>
+                <a:ea typeface="Amiri" pitchFamily="2" charset="-78"/>
                 <a:cs typeface="Amiri" pitchFamily="2" charset="-78"/>
               </a:rPr>
               <a:t>نَتَّصِلُ قَبْلَ الزِّيَارَةِ، بَيْنَمَا يَزُورُونَ بِدُونِ مَوْعِدٍ.</a:t>
@@ -7500,6 +7550,7 @@
                   <a:srgbClr val="1B3B6F"/>
                 </a:solidFill>
                 <a:latin typeface="Amiri" pitchFamily="2" charset="-78"/>
+                <a:ea typeface="Amiri" pitchFamily="2" charset="-78"/>
                 <a:cs typeface="Amiri" pitchFamily="2" charset="-78"/>
               </a:rPr>
               <a:t>لَيْسَتْ إِحْدَاهُمَا أَفْضَلَ مِنَ الأُخْرَى.</a:t>
@@ -7661,6 +7712,7 @@
                   <a:srgbClr val="1F2A37"/>
                 </a:solidFill>
                 <a:latin typeface="Amiri" pitchFamily="2" charset="-78"/>
+                <a:ea typeface="Amiri" pitchFamily="2" charset="-78"/>
                 <a:cs typeface="Amiri" pitchFamily="2" charset="-78"/>
               </a:rPr>
               <a:t>أ</a:t>
@@ -7687,6 +7739,7 @@
                   <a:srgbClr val="1F2A37"/>
                 </a:solidFill>
                 <a:latin typeface="Amiri" pitchFamily="2" charset="-78"/>
+                <a:ea typeface="Amiri" pitchFamily="2" charset="-78"/>
                 <a:cs typeface="Amiri" pitchFamily="2" charset="-78"/>
               </a:rPr>
               <a:t>ب</a:t>
@@ -7833,6 +7886,7 @@
                   <a:srgbClr val="D4AF37"/>
                 </a:solidFill>
                 <a:latin typeface="Amiri" pitchFamily="2" charset="-78"/>
+                <a:ea typeface="Amiri" pitchFamily="2" charset="-78"/>
                 <a:cs typeface="Amiri" pitchFamily="2" charset="-78"/>
               </a:rPr>
               <a:t>م</a:t>
@@ -8090,6 +8144,7 @@
                   <a:srgbClr val="8A6D1E"/>
                 </a:solidFill>
                 <a:latin typeface="Amiri" pitchFamily="2" charset="-78"/>
+                <a:ea typeface="Amiri" pitchFamily="2" charset="-78"/>
                 <a:cs typeface="Amiri" pitchFamily="2" charset="-78"/>
               </a:rPr>
               <a:t>أ</a:t>
@@ -8154,6 +8209,7 @@
                   <a:srgbClr val="1B3B6F"/>
                 </a:solidFill>
                 <a:latin typeface="Amiri" pitchFamily="2" charset="-78"/>
+                <a:ea typeface="Amiri" pitchFamily="2" charset="-78"/>
                 <a:cs typeface="Amiri" pitchFamily="2" charset="-78"/>
               </a:rPr>
               <a:t>أ</a:t>
@@ -8205,6 +8261,7 @@
                   <a:srgbClr val="8A6D1E"/>
                 </a:solidFill>
                 <a:latin typeface="Amiri" pitchFamily="2" charset="-78"/>
+                <a:ea typeface="Amiri" pitchFamily="2" charset="-78"/>
                 <a:cs typeface="Amiri" pitchFamily="2" charset="-78"/>
               </a:rPr>
               <a:t>نَمُوذَجُ الإِجَابَةِ</a:t>
@@ -8318,6 +8375,7 @@
                   <a:srgbClr val="1F2A37"/>
                 </a:solidFill>
                 <a:latin typeface="Amiri" pitchFamily="2" charset="-78"/>
+                <a:ea typeface="Amiri" pitchFamily="2" charset="-78"/>
                 <a:cs typeface="Amiri" pitchFamily="2" charset="-78"/>
               </a:rPr>
               <a:t>أَنَا حَمْزَةُ، وَأَعِيشُ فِي مَانْشِسْتَرَ، لٰكِنَّ أَصْلَ أُسْرَتِي مِنَ السُّودَانِ. أَزُورُ السُّودَانَ كُلَّ صَيْفٍ، لِذٰلِكَ أَعْرِفُ الثَّقَافَتَيْنِ جَيِّدًا، وَأُحِبُّهُمَا مَعًا.</a:t>
@@ -8337,6 +8395,7 @@
                   <a:srgbClr val="1F2A37"/>
                 </a:solidFill>
                 <a:latin typeface="Amiri" pitchFamily="2" charset="-78"/>
+                <a:ea typeface="Amiri" pitchFamily="2" charset="-78"/>
                 <a:cs typeface="Amiri" pitchFamily="2" charset="-78"/>
               </a:rPr>
               <a:t>أَوَّلًا، الطَّقْسُ مُخْتَلِفٌ جِدًّا. فِي السُّودَانِ الطَّقْسُ أَحَرُّ بِكَثِيرٍ، بَيْنَمَا الطَّقْسُ فِي مَانْشِسْتَرَ بَارِدٌ وَمُمْطِرٌ غَالِبًا. لِذٰلِكَ يَخْرُجُ النَّاسُ هُنَاكَ فِي المَسَاءِ، أَمَّا هُنَا فَيَخْرُجُونَ فِي النَّهَارِ.</a:t>
@@ -8356,6 +8415,7 @@
                   <a:srgbClr val="1F2A37"/>
                 </a:solidFill>
                 <a:latin typeface="Amiri" pitchFamily="2" charset="-78"/>
+                <a:ea typeface="Amiri" pitchFamily="2" charset="-78"/>
                 <a:cs typeface="Amiri" pitchFamily="2" charset="-78"/>
               </a:rPr>
               <a:t>ثَانِيًا، العَائِلَةُ فِي السُّودَانِ أَكْبَرُ. يَسْكُنُ جَدِّي مَعَ أَعْمَامِي وَأَوْلَادِهِمْ فِي بَيْتٍ وَاحِدٍ، بَيْنَمَا نَسْكُنُ هُنَا فِي بَيْتٍ صَغِيرٍ مَعَ وَالِدَيَّ وَأُخْتِي. كَذٰلِكَ يَزُورُ النَّاسُ هُنَاكَ بَعْضَهُمْ بِدُونِ مَوْعِدٍ، أَمَّا هُنَا فَنَتَّصِلُ قَبْلَ الزِّيَارَةِ بِيَوْمٍ أَوْ يَوْمَيْنِ غَالِبًا.</a:t>
@@ -8375,6 +8435,7 @@
                   <a:srgbClr val="1F2A37"/>
                 </a:solidFill>
                 <a:latin typeface="Amiri" pitchFamily="2" charset="-78"/>
+                <a:ea typeface="Amiri" pitchFamily="2" charset="-78"/>
                 <a:cs typeface="Amiri" pitchFamily="2" charset="-78"/>
               </a:rPr>
               <a:t>وَلٰكِنْ هُنَاكَ أَشْيَاءُ مُتَشَابِهَةٌ أَيْضًا؛ مَثَلًا، فِي البَلَدَيْنِ يُحِبُّ النَّاسُ كُرَةَ القَدَمِ وَالشَّايَ بِالحَلِيبِ! فِي رَأْيِي، الثَّقَافَتَانِ مُخْتَلِفَتَانِ، لٰكِنْ لَيْسَتْ إِحْدَاهُمَا أَفْضَلَ مِنَ الأُخْرَى. فِي المُسْتَقْبَلِ سَأَعِيشُ هُنَا، وَسَأَزُورُ السُّودَانَ دَائِمًا مَعَ أَوْلَادِي.</a:t>
@@ -8538,11 +8599,12 @@
               <a:buNone/>
             </a:pPr>
             <a:r>
-              <a:rPr lang="en-US" sz="950" b="1" dirty="0">
+              <a:rPr lang="ar-SA" sz="950" b="1" dirty="0">
                 <a:solidFill>
                   <a:srgbClr val="FFFFFF"/>
                 </a:solidFill>
                 <a:latin typeface="Calibri" pitchFamily="34" charset="0"/>
+                <a:ea typeface="Amiri" pitchFamily="2" charset="-78"/>
                 <a:cs typeface="Amiri" pitchFamily="2" charset="-78"/>
               </a:rPr>
               <a:t>أَحَرُّ بِكَثِيرٍ</a:t>
@@ -8603,11 +8665,12 @@
               <a:buNone/>
             </a:pPr>
             <a:r>
-              <a:rPr lang="en-US" sz="950" b="1" dirty="0">
+              <a:rPr lang="ar-SA" sz="950" b="1" dirty="0">
                 <a:solidFill>
                   <a:srgbClr val="FFFFFF"/>
                 </a:solidFill>
                 <a:latin typeface="Calibri" pitchFamily="34" charset="0"/>
+                <a:ea typeface="Amiri" pitchFamily="2" charset="-78"/>
                 <a:cs typeface="Amiri" pitchFamily="2" charset="-78"/>
               </a:rPr>
               <a:t>بَيْنَمَا الطَّقْسُ</a:t>
@@ -8668,11 +8731,12 @@
               <a:buNone/>
             </a:pPr>
             <a:r>
-              <a:rPr lang="en-US" sz="950" b="1" dirty="0">
+              <a:rPr lang="ar-SA" sz="950" b="1" dirty="0">
                 <a:solidFill>
                   <a:srgbClr val="FFFFFF"/>
                 </a:solidFill>
                 <a:latin typeface="Calibri" pitchFamily="34" charset="0"/>
+                <a:ea typeface="Amiri" pitchFamily="2" charset="-78"/>
                 <a:cs typeface="Amiri" pitchFamily="2" charset="-78"/>
               </a:rPr>
               <a:t>أَمَّا هُنَا فَيَخْرُجُونَ</a:t>
@@ -8733,11 +8797,12 @@
               <a:buNone/>
             </a:pPr>
             <a:r>
-              <a:rPr lang="en-US" sz="950" b="1" dirty="0">
+              <a:rPr lang="ar-SA" sz="950" b="1" dirty="0">
                 <a:solidFill>
                   <a:srgbClr val="FFFFFF"/>
                 </a:solidFill>
                 <a:latin typeface="Calibri" pitchFamily="34" charset="0"/>
+                <a:ea typeface="Amiri" pitchFamily="2" charset="-78"/>
                 <a:cs typeface="Amiri" pitchFamily="2" charset="-78"/>
               </a:rPr>
               <a:t>لَيْسَتْ إِحْدَاهُمَا</a:t>
@@ -8871,6 +8936,7 @@
                   <a:srgbClr val="D4AF37"/>
                 </a:solidFill>
                 <a:latin typeface="Amiri" pitchFamily="2" charset="-78"/>
+                <a:ea typeface="Amiri" pitchFamily="2" charset="-78"/>
                 <a:cs typeface="Amiri" pitchFamily="2" charset="-78"/>
               </a:rPr>
               <a:t>م</a:t>
@@ -9128,6 +9194,7 @@
                   <a:srgbClr val="8A6D1E"/>
                 </a:solidFill>
                 <a:latin typeface="Amiri" pitchFamily="2" charset="-78"/>
+                <a:ea typeface="Amiri" pitchFamily="2" charset="-78"/>
                 <a:cs typeface="Amiri" pitchFamily="2" charset="-78"/>
               </a:rPr>
               <a:t>أ</a:t>
@@ -9192,6 +9259,7 @@
                   <a:srgbClr val="1B3B6F"/>
                 </a:solidFill>
                 <a:latin typeface="Amiri" pitchFamily="2" charset="-78"/>
+                <a:ea typeface="Amiri" pitchFamily="2" charset="-78"/>
                 <a:cs typeface="Amiri" pitchFamily="2" charset="-78"/>
               </a:rPr>
               <a:t>أ</a:t>
@@ -9243,6 +9311,7 @@
                   <a:srgbClr val="8A6D1E"/>
                 </a:solidFill>
                 <a:latin typeface="Amiri" pitchFamily="2" charset="-78"/>
+                <a:ea typeface="Amiri" pitchFamily="2" charset="-78"/>
                 <a:cs typeface="Amiri" pitchFamily="2" charset="-78"/>
               </a:rPr>
               <a:t>نَمُوذَجُ الإِجَابَةِ</a:t>
@@ -9356,6 +9425,7 @@
                   <a:srgbClr val="1F2A37"/>
                 </a:solidFill>
                 <a:latin typeface="Amiri" pitchFamily="2" charset="-78"/>
+                <a:ea typeface="Amiri" pitchFamily="2" charset="-78"/>
                 <a:cs typeface="Amiri" pitchFamily="2" charset="-78"/>
               </a:rPr>
               <a:t>حِينَ أَهْبِطُ فِي مَطَارِ الخُرْطُومِ كُلَّ صَيْفٍ، أَشْعُرُ بِأَنَّنِي أَنْتَقِلُ مِنْ عَالَمٍ إِلَى آخَرَ فِي سَاعَاتٍ قَلِيلَةٍ؛ فَالحَرُّ يُعَانِقُنِي، وَالأَصْوَاتُ أَعْلَى، وَالزَّمَنُ نَفْسُهُ يَبْدُو أَبْطَأَ.</a:t>
@@ -9375,6 +9445,7 @@
                   <a:srgbClr val="1F2A37"/>
                 </a:solidFill>
                 <a:latin typeface="Amiri" pitchFamily="2" charset="-78"/>
+                <a:ea typeface="Amiri" pitchFamily="2" charset="-78"/>
                 <a:cs typeface="Amiri" pitchFamily="2" charset="-78"/>
               </a:rPr>
               <a:t>فَفِي مَانْشِسْتَرَ تُدِيرُ السَّاعَةُ حَيَاتَنَا: مَوَاعِيدُ دَقِيقَةٌ، وَزِيَارَاتٌ مُخَطَّطٌ لَهَا مُسْبَقًا، وَعَشَاءٌ فِي السَّادِسَةِ تَمَامًا، وَهُدُوءٌ فِي الشَّوَارِعِ بَعْدَ العَاشِرَةِ. أَمَّا فِي الخُرْطُومِ، فَالعَلَاقَاتُ هِيَ الَّتِي تُدِيرُ السَّاعَةَ؛ إِذْ يُمْكِنُ أَنْ يَطْرُقَ قَرِيبٌ البَابَ فِي أَيِّ وَقْتٍ، فَيُسْتَقْبَلَ كَأَنَّهُ كَانَ مُنْتَظَرًا مُنْذُ أَيَّامٍ.</a:t>
@@ -9394,6 +9465,7 @@
                   <a:srgbClr val="1F2A37"/>
                 </a:solidFill>
                 <a:latin typeface="Amiri" pitchFamily="2" charset="-78"/>
+                <a:ea typeface="Amiri" pitchFamily="2" charset="-78"/>
                 <a:cs typeface="Amiri" pitchFamily="2" charset="-78"/>
               </a:rPr>
               <a:t>وَقَدْ كُنْتُ فِي صِغَرِي أُقَارِنُ بَيْنَ البَلَدَيْنِ بِطَرِيقَةٍ ظَالِمَةٍ، فَأَرَى هٰذَا "مُنَظَّمًا" وَذَاكَ "فَوْضَوِيًّا". غَيْرَ أَنَّنِي أَدْرَكْتُ مَعَ الوَقْتِ أَنَّ لِكُلِّ نِظَامٍ مَنْطِقَهُ؛ فَالمُرُونَةُ السُّودَانِيَّةُ تَصْنَعُ دِفْئًا لَا تَصْنَعُهُ الجَدَاوِلُ، وَالدِّقَّةُ البَرِيطَانِيَّةُ تَحْمِي وَقْتَ الإِنْسَانِ وَخُصُوصِيَّتَهُ وَرَاحَتَهُ.</a:t>
@@ -9413,6 +9485,7 @@
                   <a:srgbClr val="1F2A37"/>
                 </a:solidFill>
                 <a:latin typeface="Amiri" pitchFamily="2" charset="-78"/>
+                <a:ea typeface="Amiri" pitchFamily="2" charset="-78"/>
                 <a:cs typeface="Amiri" pitchFamily="2" charset="-78"/>
               </a:rPr>
               <a:t>لِذٰلِكَ لَا أَقُولُ إِنَّ إِحْدَى الثَّقَافَتَيْنِ أَفْضَلُ مِنَ الأُخْرَى، بَلْ إِنَّنِي مَحْظُوظٌ لِأَنَّنِي أَعِيشُ بَيْنَهُمَا. وَلَوْ جَمَعْتُ أَجْمَلَ مَا فِيهِمَا، لَصَنَعْتُ ثَقَافَةً ثَالِثَةً: دَقِيقَةً فِي المَوَاعِيدِ، وَكَرِيمَةً فِي القُلُوبِ.</a:t>
@@ -9511,11 +9584,12 @@
               <a:buNone/>
             </a:pPr>
             <a:r>
-              <a:rPr lang="en-US" sz="950" b="1" dirty="0">
+              <a:rPr lang="ar-SA" sz="950" b="1" dirty="0">
                 <a:solidFill>
                   <a:srgbClr val="FFFFFF"/>
                 </a:solidFill>
                 <a:latin typeface="Calibri" pitchFamily="34" charset="0"/>
+                <a:ea typeface="Amiri" pitchFamily="2" charset="-78"/>
                 <a:cs typeface="Amiri" pitchFamily="2" charset="-78"/>
               </a:rPr>
               <a:t>يَبْدُو أَبْطَأَ</a:t>
@@ -9576,11 +9650,12 @@
               <a:buNone/>
             </a:pPr>
             <a:r>
-              <a:rPr lang="en-US" sz="950" b="1" dirty="0">
+              <a:rPr lang="ar-SA" sz="950" b="1" dirty="0">
                 <a:solidFill>
                   <a:srgbClr val="FFFFFF"/>
                 </a:solidFill>
                 <a:latin typeface="Calibri" pitchFamily="34" charset="0"/>
+                <a:ea typeface="Amiri" pitchFamily="2" charset="-78"/>
                 <a:cs typeface="Amiri" pitchFamily="2" charset="-78"/>
               </a:rPr>
               <a:t>أَمَّا فِي الخُرْطُومِ، فَالعَلَاقَاتُ</a:t>
@@ -9641,11 +9716,12 @@
               <a:buNone/>
             </a:pPr>
             <a:r>
-              <a:rPr lang="en-US" sz="950" b="1" dirty="0">
+              <a:rPr lang="ar-SA" sz="950" b="1" dirty="0">
                 <a:solidFill>
                   <a:srgbClr val="FFFFFF"/>
                 </a:solidFill>
                 <a:latin typeface="Calibri" pitchFamily="34" charset="0"/>
+                <a:ea typeface="Amiri" pitchFamily="2" charset="-78"/>
                 <a:cs typeface="Amiri" pitchFamily="2" charset="-78"/>
               </a:rPr>
               <a:t>لِكُلِّ نِظَامٍ مَنْطِقَهُ</a:t>
@@ -9706,11 +9782,12 @@
               <a:buNone/>
             </a:pPr>
             <a:r>
-              <a:rPr lang="en-US" sz="950" b="1" dirty="0">
+              <a:rPr lang="ar-SA" sz="950" b="1" dirty="0">
                 <a:solidFill>
                   <a:srgbClr val="FFFFFF"/>
                 </a:solidFill>
                 <a:latin typeface="Calibri" pitchFamily="34" charset="0"/>
+                <a:ea typeface="Amiri" pitchFamily="2" charset="-78"/>
                 <a:cs typeface="Amiri" pitchFamily="2" charset="-78"/>
               </a:rPr>
               <a:t>لَوْ جَمَعْتُ … لَصَنَعْتُ</a:t>
@@ -9844,6 +9921,7 @@
                   <a:srgbClr val="D4AF37"/>
                 </a:solidFill>
                 <a:latin typeface="Amiri" pitchFamily="2" charset="-78"/>
+                <a:ea typeface="Amiri" pitchFamily="2" charset="-78"/>
                 <a:cs typeface="Amiri" pitchFamily="2" charset="-78"/>
               </a:rPr>
               <a:t>م</a:t>
@@ -10101,6 +10179,7 @@
                   <a:srgbClr val="8A6D1E"/>
                 </a:solidFill>
                 <a:latin typeface="Amiri" pitchFamily="2" charset="-78"/>
+                <a:ea typeface="Amiri" pitchFamily="2" charset="-78"/>
                 <a:cs typeface="Amiri" pitchFamily="2" charset="-78"/>
               </a:rPr>
               <a:t>ب</a:t>
@@ -10165,6 +10244,7 @@
                   <a:srgbClr val="1B3B6F"/>
                 </a:solidFill>
                 <a:latin typeface="Amiri" pitchFamily="2" charset="-78"/>
+                <a:ea typeface="Amiri" pitchFamily="2" charset="-78"/>
                 <a:cs typeface="Amiri" pitchFamily="2" charset="-78"/>
               </a:rPr>
               <a:t>ب</a:t>
@@ -10216,6 +10296,7 @@
                   <a:srgbClr val="8A6D1E"/>
                 </a:solidFill>
                 <a:latin typeface="Amiri" pitchFamily="2" charset="-78"/>
+                <a:ea typeface="Amiri" pitchFamily="2" charset="-78"/>
                 <a:cs typeface="Amiri" pitchFamily="2" charset="-78"/>
               </a:rPr>
               <a:t>نَمُوذَجُ الإِجَابَةِ</a:t>
@@ -10329,6 +10410,7 @@
                   <a:srgbClr val="1F2A37"/>
                 </a:solidFill>
                 <a:latin typeface="Amiri" pitchFamily="2" charset="-78"/>
+                <a:ea typeface="Amiri" pitchFamily="2" charset="-78"/>
                 <a:cs typeface="Amiri" pitchFamily="2" charset="-78"/>
               </a:rPr>
               <a:t>نُقَارِنُ كُلَّ يَوْمٍ بَيْنَ الثَّقَافَاتِ دُونَ أَنْ نَشْعُرَ بِذٰلِكَ: هٰذَا الطَّعَامُ أَلَذُّ، وَتِلْكَ العَادَاتُ أَغْرَبُ، وَأُولٰئِكَ النَّاسُ أَكْثَرُ بُرُودًا. فَكَيْفَ نُقَارِنُ بَيْنَ الثَّقَافَاتِ دُونَ أَنْ نَحْكُمَ عَلَيْهَا؟</a:t>
@@ -10348,6 +10430,7 @@
                   <a:srgbClr val="1F2A37"/>
                 </a:solidFill>
                 <a:latin typeface="Amiri" pitchFamily="2" charset="-78"/>
+                <a:ea typeface="Amiri" pitchFamily="2" charset="-78"/>
                 <a:cs typeface="Amiri" pitchFamily="2" charset="-78"/>
               </a:rPr>
               <a:t>أَوَّلًا، يَجِبُ أَنْ نَتَجَنَّبَ التَّعْمِيمَ؛ فَلَيْسَ كُلُّ الإِنْجْلِيزِ بَارِدِينَ، وَلَيْسَ كُلُّ العَرَبِ مُتَأَخِّرِينَ. لِذٰلِكَ مِنَ الأَدَقِّ أَنْ نَقُولَ "غَالِبًا" أَوْ "بَعْضُ النَّاسِ". ثَانِيًا، عَلَيْنَا أَنْ نَسْأَلَ عَنِ السَّبَبِ قَبْلَ أَنْ نَحْكُمَ؛ فَالعَادَةُ الَّتِي تَبْدُو غَرِيبَةً لَهَا غَالِبًا تَفْسِيرٌ مَنْطِقِيٌّ يَرْتَبِطُ بِالطَّقْسِ أَوِ الدِّينِ أَوِ التَّارِيخِ.</a:t>
@@ -10367,6 +10450,7 @@
                   <a:srgbClr val="1F2A37"/>
                 </a:solidFill>
                 <a:latin typeface="Amiri" pitchFamily="2" charset="-78"/>
+                <a:ea typeface="Amiri" pitchFamily="2" charset="-78"/>
                 <a:cs typeface="Amiri" pitchFamily="2" charset="-78"/>
               </a:rPr>
               <a:t>وَقَدْ تَعَلَّمْتُ ذٰلِكَ عِنْدَمَا ضَحِكْتُ مِنْ صَدِيقٍ يَابَانِيٍّ يَخْلَعُ حِذَاءَهُ فِي المَدْرَسَةِ، ثُمَّ تَذَكَّرْتُ أَنَّنَا نَخْلَعُ أَحْذِيَتَنَا فِي المَسْجِدِ لِلسَّبَبِ نَفْسِهِ تَقْرِيبًا: النَّظَافَةُ وَالاحْتِرَامُ. فَخَجِلْتُ مِنْ نَفْسِي، وَاعْتَذَرْتُ لَهُ، فَصَارَ مِنْ أَقْرَبِ أَصْدِقَائِي.</a:t>
@@ -10386,6 +10470,7 @@
                   <a:srgbClr val="1F2A37"/>
                 </a:solidFill>
                 <a:latin typeface="Amiri" pitchFamily="2" charset="-78"/>
+                <a:ea typeface="Amiri" pitchFamily="2" charset="-78"/>
                 <a:cs typeface="Amiri" pitchFamily="2" charset="-78"/>
               </a:rPr>
               <a:t>صَحِيحٌ أَنَّ المُقَارَنَةَ طَبِيعِيَّةٌ وَمُفِيدَةٌ أَحْيَانًا، غَيْرَ أَنَّ هَدَفَهَا يَنْبَغِي أَنْ يَكُونَ الفَهْمَ لَا التَّفْضِيلَ. فَإِذَا قُلْنَا "مُخْتَلِفٌ" بَدَلًا مِنْ "أَسْوَأَ"، فَسَيُصْبِحُ العَالَمُ أَوْسَعَ لِلْجَمِيعِ، وَأَكْثَرَ دِفْئًا وَأَقَلَّ خَوْفًا.</a:t>
@@ -10484,11 +10569,12 @@
               <a:buNone/>
             </a:pPr>
             <a:r>
-              <a:rPr lang="en-US" sz="950" b="1" dirty="0">
+              <a:rPr lang="ar-SA" sz="950" b="1" dirty="0">
                 <a:solidFill>
                   <a:srgbClr val="FFFFFF"/>
                 </a:solidFill>
                 <a:latin typeface="Calibri" pitchFamily="34" charset="0"/>
+                <a:ea typeface="Amiri" pitchFamily="2" charset="-78"/>
                 <a:cs typeface="Amiri" pitchFamily="2" charset="-78"/>
               </a:rPr>
               <a:t>أَلَذُّ … أَغْرَبُ … أَكْثَرُ بُرُودًا</a:t>
@@ -10549,11 +10635,12 @@
               <a:buNone/>
             </a:pPr>
             <a:r>
-              <a:rPr lang="en-US" sz="950" b="1" dirty="0">
+              <a:rPr lang="ar-SA" sz="950" b="1" dirty="0">
                 <a:solidFill>
                   <a:srgbClr val="FFFFFF"/>
                 </a:solidFill>
                 <a:latin typeface="Calibri" pitchFamily="34" charset="0"/>
+                <a:ea typeface="Amiri" pitchFamily="2" charset="-78"/>
                 <a:cs typeface="Amiri" pitchFamily="2" charset="-78"/>
               </a:rPr>
               <a:t>لَيْسَ كُلُّ … وَلَيْسَ كُلُّ</a:t>
@@ -10614,11 +10701,12 @@
               <a:buNone/>
             </a:pPr>
             <a:r>
-              <a:rPr lang="en-US" sz="950" b="1" dirty="0">
+              <a:rPr lang="ar-SA" sz="950" b="1" dirty="0">
                 <a:solidFill>
                   <a:srgbClr val="FFFFFF"/>
                 </a:solidFill>
                 <a:latin typeface="Calibri" pitchFamily="34" charset="0"/>
+                <a:ea typeface="Amiri" pitchFamily="2" charset="-78"/>
                 <a:cs typeface="Amiri" pitchFamily="2" charset="-78"/>
               </a:rPr>
               <a:t>لِلسَّبَبِ نَفْسِهِ</a:t>
@@ -10679,11 +10767,12 @@
               <a:buNone/>
             </a:pPr>
             <a:r>
-              <a:rPr lang="en-US" sz="950" b="1" dirty="0">
+              <a:rPr lang="ar-SA" sz="950" b="1" dirty="0">
                 <a:solidFill>
                   <a:srgbClr val="FFFFFF"/>
                 </a:solidFill>
                 <a:latin typeface="Calibri" pitchFamily="34" charset="0"/>
+                <a:ea typeface="Amiri" pitchFamily="2" charset="-78"/>
                 <a:cs typeface="Amiri" pitchFamily="2" charset="-78"/>
               </a:rPr>
               <a:t>الفَهْمَ لَا التَّفْضِيلَ</a:t>
@@ -10817,6 +10906,7 @@
                   <a:srgbClr val="D4AF37"/>
                 </a:solidFill>
                 <a:latin typeface="Amiri" pitchFamily="2" charset="-78"/>
+                <a:ea typeface="Amiri" pitchFamily="2" charset="-78"/>
                 <a:cs typeface="Amiri" pitchFamily="2" charset="-78"/>
               </a:rPr>
               <a:t>م</a:t>
@@ -11137,6 +11227,7 @@
                   <a:srgbClr val="8A6D1E"/>
                 </a:solidFill>
                 <a:latin typeface="Amiri" pitchFamily="2" charset="-78"/>
+                <a:ea typeface="Amiri" pitchFamily="2" charset="-78"/>
                 <a:cs typeface="Amiri" pitchFamily="2" charset="-78"/>
               </a:rPr>
               <a:t>قَيِّمْ عَمَلَكَ</a:t>
@@ -12381,6 +12472,7 @@
                   <a:srgbClr val="FFFFFF"/>
                 </a:solidFill>
                 <a:latin typeface="Amiri" pitchFamily="2" charset="-78"/>
+                <a:ea typeface="Amiri" pitchFamily="2" charset="-78"/>
                 <a:cs typeface="Amiri" pitchFamily="2" charset="-78"/>
               </a:rPr>
               <a:t>أَحْسَنْتُمْ! إِلَى اللِّقَاءِ</a:t>
@@ -12533,6 +12625,7 @@
                   <a:srgbClr val="D4AF37"/>
                 </a:solidFill>
                 <a:latin typeface="Amiri" pitchFamily="2" charset="-78"/>
+                <a:ea typeface="Amiri" pitchFamily="2" charset="-78"/>
                 <a:cs typeface="Amiri" pitchFamily="2" charset="-78"/>
               </a:rPr>
               <a:t>وَرْشَةُ التَّدْرِيبِ</a:t>
@@ -12666,6 +12759,7 @@
                   <a:srgbClr val="D4AF37"/>
                 </a:solidFill>
                 <a:latin typeface="Amiri" pitchFamily="2" charset="-78"/>
+                <a:ea typeface="Amiri" pitchFamily="2" charset="-78"/>
                 <a:cs typeface="Amiri" pitchFamily="2" charset="-78"/>
               </a:rPr>
               <a:t>م</a:t>
@@ -12986,6 +13080,7 @@
                   <a:srgbClr val="8A6D1E"/>
                 </a:solidFill>
                 <a:latin typeface="Amiri" pitchFamily="2" charset="-78"/>
+                <a:ea typeface="Amiri" pitchFamily="2" charset="-78"/>
                 <a:cs typeface="Amiri" pitchFamily="2" charset="-78"/>
               </a:rPr>
               <a:t>آدَابُ الصَّفِّ</a:t>
@@ -14517,6 +14612,7 @@
                   <a:srgbClr val="D4AF37"/>
                 </a:solidFill>
                 <a:latin typeface="Amiri" pitchFamily="2" charset="-78"/>
+                <a:ea typeface="Amiri" pitchFamily="2" charset="-78"/>
                 <a:cs typeface="Amiri" pitchFamily="2" charset="-78"/>
               </a:rPr>
               <a:t>م</a:t>
@@ -14837,6 +14933,7 @@
                   <a:srgbClr val="8A6D1E"/>
                 </a:solidFill>
                 <a:latin typeface="Amiri" pitchFamily="2" charset="-78"/>
+                <a:ea typeface="Amiri" pitchFamily="2" charset="-78"/>
                 <a:cs typeface="Amiri" pitchFamily="2" charset="-78"/>
               </a:rPr>
               <a:t>خَرِيطَةُ الوَرْشَةِ</a:t>
@@ -15151,6 +15248,7 @@
                   <a:srgbClr val="1B3B6F"/>
                 </a:solidFill>
                 <a:latin typeface="Amiri" pitchFamily="2" charset="-78"/>
+                <a:ea typeface="Amiri" pitchFamily="2" charset="-78"/>
                 <a:cs typeface="Amiri" pitchFamily="2" charset="-78"/>
               </a:rPr>
               <a:t>كَيْفَ</a:t>
@@ -15427,6 +15525,7 @@
                   <a:srgbClr val="1E6B52"/>
                 </a:solidFill>
                 <a:latin typeface="Amiri" pitchFamily="2" charset="-78"/>
+                <a:ea typeface="Amiri" pitchFamily="2" charset="-78"/>
                 <a:cs typeface="Amiri" pitchFamily="2" charset="-78"/>
               </a:rPr>
               <a:t>الاسْتِمَارَةُ</a:t>
@@ -15703,6 +15802,7 @@
                   <a:srgbClr val="1E6B52"/>
                 </a:solidFill>
                 <a:latin typeface="Amiri" pitchFamily="2" charset="-78"/>
+                <a:ea typeface="Amiri" pitchFamily="2" charset="-78"/>
                 <a:cs typeface="Amiri" pitchFamily="2" charset="-78"/>
               </a:rPr>
               <a:t>الرِّسَالَةُ</a:t>
@@ -15979,6 +16079,7 @@
                   <a:srgbClr val="1E6B52"/>
                 </a:solidFill>
                 <a:latin typeface="Amiri" pitchFamily="2" charset="-78"/>
+                <a:ea typeface="Amiri" pitchFamily="2" charset="-78"/>
                 <a:cs typeface="Amiri" pitchFamily="2" charset="-78"/>
               </a:rPr>
               <a:t>المَقَالُ</a:t>
@@ -16255,6 +16356,7 @@
                   <a:srgbClr val="8A6D1E"/>
                 </a:solidFill>
                 <a:latin typeface="Amiri" pitchFamily="2" charset="-78"/>
+                <a:ea typeface="Amiri" pitchFamily="2" charset="-78"/>
                 <a:cs typeface="Amiri" pitchFamily="2" charset="-78"/>
               </a:rPr>
               <a:t>قَيِّمْ</a:t>
@@ -16498,6 +16600,7 @@
                   <a:srgbClr val="D4AF37"/>
                 </a:solidFill>
                 <a:latin typeface="Amiri" pitchFamily="2" charset="-78"/>
+                <a:ea typeface="Amiri" pitchFamily="2" charset="-78"/>
                 <a:cs typeface="Amiri" pitchFamily="2" charset="-78"/>
               </a:rPr>
               <a:t>م</a:t>
@@ -16818,6 +16921,7 @@
                   <a:srgbClr val="8A6D1E"/>
                 </a:solidFill>
                 <a:latin typeface="Amiri" pitchFamily="2" charset="-78"/>
+                <a:ea typeface="Amiri" pitchFamily="2" charset="-78"/>
                 <a:cs typeface="Amiri" pitchFamily="2" charset="-78"/>
               </a:rPr>
               <a:t>امْتِحَانُ الكِتَابَةِ</a:t>
@@ -17442,6 +17546,7 @@
                   <a:srgbClr val="1B3B6F"/>
                 </a:solidFill>
                 <a:latin typeface="Amiri" pitchFamily="2" charset="-78"/>
+                <a:ea typeface="Amiri" pitchFamily="2" charset="-78"/>
                 <a:cs typeface="Amiri" pitchFamily="2" charset="-78"/>
               </a:rPr>
               <a:t>يَبْدَأُ يَوْمِي فِي الثَّامِنَةِ، بَيْنَمَا يَبْدَأُ يَوْمُكَ فِي السَّابِعَةِ</a:t>
@@ -17541,6 +17646,7 @@
                   <a:srgbClr val="1B3B6F"/>
                 </a:solidFill>
                 <a:latin typeface="Amiri" pitchFamily="2" charset="-78"/>
+                <a:ea typeface="Amiri" pitchFamily="2" charset="-78"/>
                 <a:cs typeface="Amiri" pitchFamily="2" charset="-78"/>
               </a:rPr>
               <a:t>عُطْلَتُنَا السَّبْتُ وَالأَحَدُ، أَمَّا عُطْلَتُكُمْ فَالجُمُعَةُ وَالسَّبْتُ</a:t>
@@ -17640,6 +17746,7 @@
                   <a:srgbClr val="1B3B6F"/>
                 </a:solidFill>
                 <a:latin typeface="Amiri" pitchFamily="2" charset="-78"/>
+                <a:ea typeface="Amiri" pitchFamily="2" charset="-78"/>
                 <a:cs typeface="Amiri" pitchFamily="2" charset="-78"/>
               </a:rPr>
               <a:t>مُخْتَلِفَتَانِ، لٰكِنْ لَيْسَتْ إِحْدَاهُمَا أَفْضَلَ مِنَ الأُخْرَى</a:t>
@@ -17811,6 +17918,7 @@
                   <a:srgbClr val="D4AF37"/>
                 </a:solidFill>
                 <a:latin typeface="Amiri" pitchFamily="2" charset="-78"/>
+                <a:ea typeface="Amiri" pitchFamily="2" charset="-78"/>
                 <a:cs typeface="Amiri" pitchFamily="2" charset="-78"/>
               </a:rPr>
               <a:t>م</a:t>
@@ -18131,6 +18239,7 @@
                   <a:srgbClr val="8A6D1E"/>
                 </a:solidFill>
                 <a:latin typeface="Amiri" pitchFamily="2" charset="-78"/>
+                <a:ea typeface="Amiri" pitchFamily="2" charset="-78"/>
                 <a:cs typeface="Amiri" pitchFamily="2" charset="-78"/>
               </a:rPr>
               <a:t>اسْتِمَارَةُ مُقَارَنَةٍ لِمَشْرُوعِ التَّوْأَمَةِ</a:t>
@@ -18487,6 +18596,7 @@
                   <a:srgbClr val="1B3B6F"/>
                 </a:solidFill>
                 <a:latin typeface="Amiri" pitchFamily="2" charset="-78"/>
+                <a:ea typeface="Amiri" pitchFamily="2" charset="-78"/>
                 <a:cs typeface="Amiri" pitchFamily="2" charset="-78"/>
               </a:rPr>
               <a:t>الاسْمُ</a:t>
@@ -18731,6 +18841,7 @@
                   <a:srgbClr val="1B3B6F"/>
                 </a:solidFill>
                 <a:latin typeface="Amiri" pitchFamily="2" charset="-78"/>
+                <a:ea typeface="Amiri" pitchFamily="2" charset="-78"/>
                 <a:cs typeface="Amiri" pitchFamily="2" charset="-78"/>
               </a:rPr>
               <a:t>مَدِينَتُكَ</a:t>
@@ -18975,6 +19086,7 @@
                   <a:srgbClr val="1B3B6F"/>
                 </a:solidFill>
                 <a:latin typeface="Amiri" pitchFamily="2" charset="-78"/>
+                <a:ea typeface="Amiri" pitchFamily="2" charset="-78"/>
                 <a:cs typeface="Amiri" pitchFamily="2" charset="-78"/>
               </a:rPr>
               <a:t>مَدِينَةُ صَدِيقِكَ</a:t>
@@ -19219,6 +19331,7 @@
                   <a:srgbClr val="1B3B6F"/>
                 </a:solidFill>
                 <a:latin typeface="Amiri" pitchFamily="2" charset="-78"/>
+                <a:ea typeface="Amiri" pitchFamily="2" charset="-78"/>
                 <a:cs typeface="Amiri" pitchFamily="2" charset="-78"/>
               </a:rPr>
               <a:t>بِدَايَةُ اليَوْمِ الدِّرَاسِيِّ عِنْدَكَ</a:t>
@@ -19463,6 +19576,7 @@
                   <a:srgbClr val="1B3B6F"/>
                 </a:solidFill>
                 <a:latin typeface="Amiri" pitchFamily="2" charset="-78"/>
+                <a:ea typeface="Amiri" pitchFamily="2" charset="-78"/>
                 <a:cs typeface="Amiri" pitchFamily="2" charset="-78"/>
               </a:rPr>
               <a:t>بِدَايَةُ اليَوْمِ الدِّرَاسِيِّ عِنْدَهُ</a:t>
@@ -19707,6 +19821,7 @@
                   <a:srgbClr val="1B3B6F"/>
                 </a:solidFill>
                 <a:latin typeface="Amiri" pitchFamily="2" charset="-78"/>
+                <a:ea typeface="Amiri" pitchFamily="2" charset="-78"/>
                 <a:cs typeface="Amiri" pitchFamily="2" charset="-78"/>
               </a:rPr>
               <a:t>أَيَّامُ العُطْلَةِ عِنْدَكَ</a:t>
@@ -19951,6 +20066,7 @@
                   <a:srgbClr val="1B3B6F"/>
                 </a:solidFill>
                 <a:latin typeface="Amiri" pitchFamily="2" charset="-78"/>
+                <a:ea typeface="Amiri" pitchFamily="2" charset="-78"/>
                 <a:cs typeface="Amiri" pitchFamily="2" charset="-78"/>
               </a:rPr>
               <a:t>تَشَابُهٌ وَاحِدٌ</a:t>
@@ -20130,6 +20246,7 @@
                   <a:srgbClr val="1B3B6F"/>
                 </a:solidFill>
                 <a:latin typeface="Amiri" pitchFamily="2" charset="-78"/>
+                <a:ea typeface="Amiri" pitchFamily="2" charset="-78"/>
                 <a:cs typeface="Amiri" pitchFamily="2" charset="-78"/>
               </a:rPr>
               <a:t>جُمْلَةٌ: قَارِنْ بَيْنَ المَدْرَسَتَيْنِ</a:t>
@@ -20339,6 +20456,7 @@
                   <a:srgbClr val="D4AF37"/>
                 </a:solidFill>
                 <a:latin typeface="Amiri" pitchFamily="2" charset="-78"/>
+                <a:ea typeface="Amiri" pitchFamily="2" charset="-78"/>
                 <a:cs typeface="Amiri" pitchFamily="2" charset="-78"/>
               </a:rPr>
               <a:t>م</a:t>
@@ -20659,6 +20777,7 @@
                   <a:srgbClr val="8A6D1E"/>
                 </a:solidFill>
                 <a:latin typeface="Amiri" pitchFamily="2" charset="-78"/>
+                <a:ea typeface="Amiri" pitchFamily="2" charset="-78"/>
                 <a:cs typeface="Amiri" pitchFamily="2" charset="-78"/>
               </a:rPr>
               <a:t>نَمُوذَجُ الإِجَابَةِ</a:t>
@@ -20977,6 +21096,7 @@
                   <a:srgbClr val="1B3B6F"/>
                 </a:solidFill>
                 <a:latin typeface="Amiri" pitchFamily="2" charset="-78"/>
+                <a:ea typeface="Amiri" pitchFamily="2" charset="-78"/>
                 <a:cs typeface="Amiri" pitchFamily="2" charset="-78"/>
               </a:rPr>
               <a:t>حَمْزَةُ أَحْمَدُ</a:t>
@@ -21015,6 +21135,7 @@
                   <a:srgbClr val="1B3B6F"/>
                 </a:solidFill>
                 <a:latin typeface="Amiri" pitchFamily="2" charset="-78"/>
+                <a:ea typeface="Amiri" pitchFamily="2" charset="-78"/>
                 <a:cs typeface="Amiri" pitchFamily="2" charset="-78"/>
               </a:rPr>
               <a:t>الاسْمُ</a:t>
@@ -21156,6 +21277,7 @@
                   <a:srgbClr val="1B3B6F"/>
                 </a:solidFill>
                 <a:latin typeface="Amiri" pitchFamily="2" charset="-78"/>
+                <a:ea typeface="Amiri" pitchFamily="2" charset="-78"/>
                 <a:cs typeface="Amiri" pitchFamily="2" charset="-78"/>
               </a:rPr>
               <a:t>مَانْشِسْتَرُ</a:t>
@@ -21194,6 +21316,7 @@
                   <a:srgbClr val="1B3B6F"/>
                 </a:solidFill>
                 <a:latin typeface="Amiri" pitchFamily="2" charset="-78"/>
+                <a:ea typeface="Amiri" pitchFamily="2" charset="-78"/>
                 <a:cs typeface="Amiri" pitchFamily="2" charset="-78"/>
               </a:rPr>
               <a:t>مَدِينَتُكَ</a:t>
@@ -21335,6 +21458,7 @@
                   <a:srgbClr val="1B3B6F"/>
                 </a:solidFill>
                 <a:latin typeface="Amiri" pitchFamily="2" charset="-78"/>
+                <a:ea typeface="Amiri" pitchFamily="2" charset="-78"/>
                 <a:cs typeface="Amiri" pitchFamily="2" charset="-78"/>
               </a:rPr>
               <a:t>الدَّوْحَةُ</a:t>
@@ -21373,6 +21497,7 @@
                   <a:srgbClr val="1B3B6F"/>
                 </a:solidFill>
                 <a:latin typeface="Amiri" pitchFamily="2" charset="-78"/>
+                <a:ea typeface="Amiri" pitchFamily="2" charset="-78"/>
                 <a:cs typeface="Amiri" pitchFamily="2" charset="-78"/>
               </a:rPr>
               <a:t>مَدِينَةُ صَدِيقِكَ</a:t>
@@ -21514,6 +21639,7 @@
                   <a:srgbClr val="1B3B6F"/>
                 </a:solidFill>
                 <a:latin typeface="Amiri" pitchFamily="2" charset="-78"/>
+                <a:ea typeface="Amiri" pitchFamily="2" charset="-78"/>
                 <a:cs typeface="Amiri" pitchFamily="2" charset="-78"/>
               </a:rPr>
               <a:t>الثَّامِنَةُ وَالنِّصْفُ</a:t>
@@ -21552,6 +21678,7 @@
                   <a:srgbClr val="1B3B6F"/>
                 </a:solidFill>
                 <a:latin typeface="Amiri" pitchFamily="2" charset="-78"/>
+                <a:ea typeface="Amiri" pitchFamily="2" charset="-78"/>
                 <a:cs typeface="Amiri" pitchFamily="2" charset="-78"/>
               </a:rPr>
               <a:t>بِدَايَةُ اليَوْمِ الدِّرَاسِيِّ عِنْدَكَ</a:t>
@@ -21693,6 +21820,7 @@
                   <a:srgbClr val="1B3B6F"/>
                 </a:solidFill>
                 <a:latin typeface="Amiri" pitchFamily="2" charset="-78"/>
+                <a:ea typeface="Amiri" pitchFamily="2" charset="-78"/>
                 <a:cs typeface="Amiri" pitchFamily="2" charset="-78"/>
               </a:rPr>
               <a:t>السَّابِعَةُ</a:t>
@@ -21731,6 +21859,7 @@
                   <a:srgbClr val="1B3B6F"/>
                 </a:solidFill>
                 <a:latin typeface="Amiri" pitchFamily="2" charset="-78"/>
+                <a:ea typeface="Amiri" pitchFamily="2" charset="-78"/>
                 <a:cs typeface="Amiri" pitchFamily="2" charset="-78"/>
               </a:rPr>
               <a:t>بِدَايَةُ اليَوْمِ الدِّرَاسِيِّ عِنْدَهُ</a:t>
@@ -21872,6 +22001,7 @@
                   <a:srgbClr val="1B3B6F"/>
                 </a:solidFill>
                 <a:latin typeface="Amiri" pitchFamily="2" charset="-78"/>
+                <a:ea typeface="Amiri" pitchFamily="2" charset="-78"/>
                 <a:cs typeface="Amiri" pitchFamily="2" charset="-78"/>
               </a:rPr>
               <a:t>السَّبْتُ وَالأَحَدُ</a:t>
@@ -21910,6 +22040,7 @@
                   <a:srgbClr val="1B3B6F"/>
                 </a:solidFill>
                 <a:latin typeface="Amiri" pitchFamily="2" charset="-78"/>
+                <a:ea typeface="Amiri" pitchFamily="2" charset="-78"/>
                 <a:cs typeface="Amiri" pitchFamily="2" charset="-78"/>
               </a:rPr>
               <a:t>أَيَّامُ العُطْلَةِ عِنْدَكَ</a:t>
@@ -22051,6 +22182,7 @@
                   <a:srgbClr val="1B3B6F"/>
                 </a:solidFill>
                 <a:latin typeface="Amiri" pitchFamily="2" charset="-78"/>
+                <a:ea typeface="Amiri" pitchFamily="2" charset="-78"/>
                 <a:cs typeface="Amiri" pitchFamily="2" charset="-78"/>
               </a:rPr>
               <a:t>حُبُّ كُرَةِ القَدَمِ</a:t>
@@ -22089,6 +22221,7 @@
                   <a:srgbClr val="1B3B6F"/>
                 </a:solidFill>
                 <a:latin typeface="Amiri" pitchFamily="2" charset="-78"/>
+                <a:ea typeface="Amiri" pitchFamily="2" charset="-78"/>
                 <a:cs typeface="Amiri" pitchFamily="2" charset="-78"/>
               </a:rPr>
               <a:t>تَشَابُهٌ وَاحِدٌ</a:t>
@@ -22230,6 +22363,7 @@
                   <a:srgbClr val="1B3B6F"/>
                 </a:solidFill>
                 <a:latin typeface="Amiri" pitchFamily="2" charset="-78"/>
+                <a:ea typeface="Amiri" pitchFamily="2" charset="-78"/>
                 <a:cs typeface="Amiri" pitchFamily="2" charset="-78"/>
               </a:rPr>
               <a:t>يَوْمُهُ أَبْكَرُ مِنْ يَوْمِي، بَيْنَمَا يَوْمِي أَطْوَلُ بِسَبَبِ النَّوَادِي.</a:t>
@@ -22268,6 +22402,7 @@
                   <a:srgbClr val="1B3B6F"/>
                 </a:solidFill>
                 <a:latin typeface="Amiri" pitchFamily="2" charset="-78"/>
+                <a:ea typeface="Amiri" pitchFamily="2" charset="-78"/>
                 <a:cs typeface="Amiri" pitchFamily="2" charset="-78"/>
               </a:rPr>
               <a:t>جُمْلَةٌ: قَارِنْ بَيْنَ المَدْرَسَتَيْنِ</a:t>
@@ -22477,6 +22612,7 @@
                   <a:srgbClr val="D4AF37"/>
                 </a:solidFill>
                 <a:latin typeface="Amiri" pitchFamily="2" charset="-78"/>
+                <a:ea typeface="Amiri" pitchFamily="2" charset="-78"/>
                 <a:cs typeface="Amiri" pitchFamily="2" charset="-78"/>
               </a:rPr>
               <a:t>م</a:t>
@@ -22797,6 +22933,7 @@
                   <a:srgbClr val="8A6D1E"/>
                 </a:solidFill>
                 <a:latin typeface="Amiri" pitchFamily="2" charset="-78"/>
+                <a:ea typeface="Amiri" pitchFamily="2" charset="-78"/>
                 <a:cs typeface="Amiri" pitchFamily="2" charset="-78"/>
               </a:rPr>
               <a:t>مَدْرَسَتِي وَمَدْرَسَتُكَ</a:t>
@@ -23272,6 +23409,7 @@
                   <a:srgbClr val="1B3B6F"/>
                 </a:solidFill>
                 <a:latin typeface="Amiri" pitchFamily="2" charset="-78"/>
+                <a:ea typeface="Amiri" pitchFamily="2" charset="-78"/>
                 <a:cs typeface="Amiri" pitchFamily="2" charset="-78"/>
               </a:rPr>
               <a:t>يَبْدَأُ يَوْمِي فِي … بَيْنَمَا يَبْدَأُ يَوْمُكَ …</a:t>
@@ -23348,6 +23486,7 @@
                   <a:srgbClr val="1B3B6F"/>
                 </a:solidFill>
                 <a:latin typeface="Amiri" pitchFamily="2" charset="-78"/>
+                <a:ea typeface="Amiri" pitchFamily="2" charset="-78"/>
                 <a:cs typeface="Amiri" pitchFamily="2" charset="-78"/>
               </a:rPr>
               <a:t>يَوْمُكَ أَبْكَرُ مِنْ يَوْمِي</a:t>
@@ -23424,6 +23563,7 @@
                   <a:srgbClr val="1B3B6F"/>
                 </a:solidFill>
                 <a:latin typeface="Amiri" pitchFamily="2" charset="-78"/>
+                <a:ea typeface="Amiri" pitchFamily="2" charset="-78"/>
                 <a:cs typeface="Amiri" pitchFamily="2" charset="-78"/>
               </a:rPr>
               <a:t>عُطْلَتُنَا … أَمَّا عُطْلَتُكُمْ فَالجُمُعَةُ …</a:t>
@@ -23500,6 +23640,7 @@
                   <a:srgbClr val="1B3B6F"/>
                 </a:solidFill>
                 <a:latin typeface="Amiri" pitchFamily="2" charset="-78"/>
+                <a:ea typeface="Amiri" pitchFamily="2" charset="-78"/>
                 <a:cs typeface="Amiri" pitchFamily="2" charset="-78"/>
               </a:rPr>
               <a:t>لَيْسَتْ إِحْدَاهُمَا أَفْضَلَ مِنَ الأُخْرَى</a:t>
@@ -23671,6 +23812,7 @@
                   <a:srgbClr val="D4AF37"/>
                 </a:solidFill>
                 <a:latin typeface="Amiri" pitchFamily="2" charset="-78"/>
+                <a:ea typeface="Amiri" pitchFamily="2" charset="-78"/>
                 <a:cs typeface="Amiri" pitchFamily="2" charset="-78"/>
               </a:rPr>
               <a:t>م</a:t>
@@ -23991,6 +24133,7 @@
                   <a:srgbClr val="8A6D1E"/>
                 </a:solidFill>
                 <a:latin typeface="Amiri" pitchFamily="2" charset="-78"/>
+                <a:ea typeface="Amiri" pitchFamily="2" charset="-78"/>
                 <a:cs typeface="Amiri" pitchFamily="2" charset="-78"/>
               </a:rPr>
               <a:t>نَصُّ السُّؤَالِ</a:t>
@@ -24271,6 +24414,7 @@
                   <a:srgbClr val="1B3B6F"/>
                 </a:solidFill>
                 <a:latin typeface="Amiri" pitchFamily="2" charset="-78"/>
+                <a:ea typeface="Amiri" pitchFamily="2" charset="-78"/>
                 <a:cs typeface="Amiri" pitchFamily="2" charset="-78"/>
               </a:rPr>
               <a:t>اكْتُبْ رِسَالَةً إِلَى صَدِيقِكَ فِي قَطَرَ تُقَارِنُ فِيهَا بَيْنَ مَدْرَسَتَيْكُمَا (٨٠–٩٠ كَلِمَةً).</a:t>
@@ -24412,6 +24556,7 @@
                   <a:srgbClr val="1B3B6F"/>
                 </a:solidFill>
                 <a:latin typeface="Amiri" pitchFamily="2" charset="-78"/>
+                <a:ea typeface="Amiri" pitchFamily="2" charset="-78"/>
                 <a:cs typeface="Amiri" pitchFamily="2" charset="-78"/>
               </a:rPr>
               <a:t>مَتَى يَبْدَأُ يَوْمُكَ وَيَنْتَهِي؟ قَارِنْ بِيَوْمِهِ.</a:t>
@@ -24553,6 +24698,7 @@
                   <a:srgbClr val="1B3B6F"/>
                 </a:solidFill>
                 <a:latin typeface="Amiri" pitchFamily="2" charset="-78"/>
+                <a:ea typeface="Amiri" pitchFamily="2" charset="-78"/>
                 <a:cs typeface="Amiri" pitchFamily="2" charset="-78"/>
               </a:rPr>
               <a:t>مَا أَيَّامُ عُطْلَتِكَ؟ قَارِنْ بِعُطْلَتِهِ.</a:t>
@@ -24694,6 +24840,7 @@
                   <a:srgbClr val="1B3B6F"/>
                 </a:solidFill>
                 <a:latin typeface="Amiri" pitchFamily="2" charset="-78"/>
+                <a:ea typeface="Amiri" pitchFamily="2" charset="-78"/>
                 <a:cs typeface="Amiri" pitchFamily="2" charset="-78"/>
               </a:rPr>
               <a:t>صِفِ الغَدَاءَ أَوْ فَرْقًا آخَرَ فِي المَدْرَسَةِ.</a:t>
@@ -24835,6 +24982,7 @@
                   <a:srgbClr val="1B3B6F"/>
                 </a:solidFill>
                 <a:latin typeface="Amiri" pitchFamily="2" charset="-78"/>
+                <a:ea typeface="Amiri" pitchFamily="2" charset="-78"/>
                 <a:cs typeface="Amiri" pitchFamily="2" charset="-78"/>
               </a:rPr>
               <a:t>مَا رَأْيُكَ فِي المَدْرَسَتَيْنِ؟ وَمَا خِطَطُكَ؟ وَاسْأَلْ صَدِيقَكَ سُؤَالًا.</a:t>
@@ -25044,6 +25192,7 @@
                   <a:srgbClr val="D4AF37"/>
                 </a:solidFill>
                 <a:latin typeface="Amiri" pitchFamily="2" charset="-78"/>
+                <a:ea typeface="Amiri" pitchFamily="2" charset="-78"/>
                 <a:cs typeface="Amiri" pitchFamily="2" charset="-78"/>
               </a:rPr>
               <a:t>م</a:t>
@@ -25364,6 +25513,7 @@
                   <a:srgbClr val="8A6D1E"/>
                 </a:solidFill>
                 <a:latin typeface="Amiri" pitchFamily="2" charset="-78"/>
+                <a:ea typeface="Amiri" pitchFamily="2" charset="-78"/>
                 <a:cs typeface="Amiri" pitchFamily="2" charset="-78"/>
               </a:rPr>
               <a:t>قَوَالِبُ الكِتَابَةِ</a:t>
@@ -25644,6 +25794,7 @@
                   <a:srgbClr val="1B3B6F"/>
                 </a:solidFill>
                 <a:latin typeface="Amiri" pitchFamily="2" charset="-78"/>
+                <a:ea typeface="Amiri" pitchFamily="2" charset="-78"/>
                 <a:cs typeface="Amiri" pitchFamily="2" charset="-78"/>
               </a:rPr>
               <a:t>مَرْحَبًا يَا ______ ، شُكْرًا عَلَى رِسَالَتِكَ.</a:t>
@@ -25850,6 +26001,7 @@
                   <a:srgbClr val="1B3B6F"/>
                 </a:solidFill>
                 <a:latin typeface="Amiri" pitchFamily="2" charset="-78"/>
+                <a:ea typeface="Amiri" pitchFamily="2" charset="-78"/>
                 <a:cs typeface="Amiri" pitchFamily="2" charset="-78"/>
               </a:rPr>
               <a:t>يَبْدَأُ يَوْمِي فِي ______ ، بَيْنَمَا يَبْدَأُ يَوْمُكَ فِي ______ .</a:t>
@@ -26056,6 +26208,7 @@
                   <a:srgbClr val="1B3B6F"/>
                 </a:solidFill>
                 <a:latin typeface="Amiri" pitchFamily="2" charset="-78"/>
+                <a:ea typeface="Amiri" pitchFamily="2" charset="-78"/>
                 <a:cs typeface="Amiri" pitchFamily="2" charset="-78"/>
               </a:rPr>
               <a:t>عُطْلَتُنَا ______ ، أَمَّا عُطْلَتُكُمْ فَهِيَ ______ .</a:t>
@@ -26262,6 +26415,7 @@
                   <a:srgbClr val="1B3B6F"/>
                 </a:solidFill>
                 <a:latin typeface="Amiri" pitchFamily="2" charset="-78"/>
+                <a:ea typeface="Amiri" pitchFamily="2" charset="-78"/>
                 <a:cs typeface="Amiri" pitchFamily="2" charset="-78"/>
               </a:rPr>
               <a:t>نَأْكُلُ الغَدَاءَ ______ ، وَهُوَ غَالِبًا ______ .</a:t>
@@ -26468,6 +26622,7 @@
                   <a:srgbClr val="1B3B6F"/>
                 </a:solidFill>
                 <a:latin typeface="Amiri" pitchFamily="2" charset="-78"/>
+                <a:ea typeface="Amiri" pitchFamily="2" charset="-78"/>
                 <a:cs typeface="Amiri" pitchFamily="2" charset="-78"/>
               </a:rPr>
               <a:t>المَدْرَسَتَانِ مُخْتَلِفَتَانِ، لٰكِنْ ______ .</a:t>
@@ -26674,6 +26829,7 @@
                   <a:srgbClr val="1B3B6F"/>
                 </a:solidFill>
                 <a:latin typeface="Amiri" pitchFamily="2" charset="-78"/>
+                <a:ea typeface="Amiri" pitchFamily="2" charset="-78"/>
                 <a:cs typeface="Amiri" pitchFamily="2" charset="-78"/>
               </a:rPr>
               <a:t>وَأَنْتَ، ______ ؟ مَعَ السَّلَامَةِ.</a:t>
@@ -26913,13 +27069,9 @@
     <a:fontScheme name="Office">
       <a:majorFont>
         <a:latin typeface="Calibri Light" panose="020F0302020204030204"/>
-        <a:ea typeface=""/>
-        <a:cs typeface=""/>
-        <a:font script="Jpan" typeface="游ゴシック Light"/>
-        <a:font script="Hang" typeface="맑은 고딕"/>
-        <a:font script="Hans" typeface="等线 Light"/>
-        <a:font script="Hant" typeface="新細明體"/>
-        <a:font script="Arab" typeface="Times New Roman"/>
+        <a:ea typeface="Amiri" pitchFamily="2" charset="-78"/>
+        <a:cs typeface="Amiri" pitchFamily="2" charset="-78"/>
+        <a:font script="Arab" typeface="Amiri"/>
         <a:font script="Hebr" typeface="Times New Roman"/>
         <a:font script="Thai" typeface="Angsana New"/>
         <a:font script="Ethi" typeface="Nyala"/>
@@ -26965,13 +27117,9 @@
       </a:majorFont>
       <a:minorFont>
         <a:latin typeface="Calibri" panose="020F0502020204030204"/>
-        <a:ea typeface=""/>
-        <a:cs typeface=""/>
-        <a:font script="Jpan" typeface="游ゴシック"/>
-        <a:font script="Hang" typeface="맑은 고딕"/>
-        <a:font script="Hans" typeface="等线"/>
-        <a:font script="Hant" typeface="新細明體"/>
-        <a:font script="Arab" typeface="Arial"/>
+        <a:ea typeface="Amiri" pitchFamily="2" charset="-78"/>
+        <a:cs typeface="Amiri" pitchFamily="2" charset="-78"/>
+        <a:font script="Arab" typeface="Amiri"/>
         <a:font script="Hebr" typeface="Arial"/>
         <a:font script="Thai" typeface="Cordia New"/>
         <a:font script="Ethi" typeface="Nyala"/>

--- a/Topic_E/Exam_Practice/TE-L09_Writing_Workshop_Comparing_Cultures_with_Respect.pptx
+++ b/Topic_E/Exam_Practice/TE-L09_Writing_Workshop_Comparing_Cultures_with_Respect.pptx
@@ -3852,7 +3852,7 @@
                 <a:solidFill>
                   <a:srgbClr val="FFFFFF"/>
                 </a:solidFill>
-                <a:latin typeface="Calibri" pitchFamily="34" charset="0"/>
+                <a:latin typeface="Amiri" pitchFamily="2" charset="-78"/>
                 <a:ea typeface="Amiri" pitchFamily="2" charset="-78"/>
                 <a:cs typeface="Amiri" pitchFamily="2" charset="-78"/>
               </a:rPr>
@@ -3918,7 +3918,7 @@
                 <a:solidFill>
                   <a:srgbClr val="FFFFFF"/>
                 </a:solidFill>
-                <a:latin typeface="Calibri" pitchFamily="34" charset="0"/>
+                <a:latin typeface="Amiri" pitchFamily="2" charset="-78"/>
                 <a:ea typeface="Amiri" pitchFamily="2" charset="-78"/>
                 <a:cs typeface="Amiri" pitchFamily="2" charset="-78"/>
               </a:rPr>
@@ -3984,7 +3984,7 @@
                 <a:solidFill>
                   <a:srgbClr val="FFFFFF"/>
                 </a:solidFill>
-                <a:latin typeface="Calibri" pitchFamily="34" charset="0"/>
+                <a:latin typeface="Amiri" pitchFamily="2" charset="-78"/>
                 <a:ea typeface="Amiri" pitchFamily="2" charset="-78"/>
                 <a:cs typeface="Amiri" pitchFamily="2" charset="-78"/>
               </a:rPr>
@@ -4050,7 +4050,7 @@
                 <a:solidFill>
                   <a:srgbClr val="FFFFFF"/>
                 </a:solidFill>
-                <a:latin typeface="Calibri" pitchFamily="34" charset="0"/>
+                <a:latin typeface="Amiri" pitchFamily="2" charset="-78"/>
                 <a:ea typeface="Amiri" pitchFamily="2" charset="-78"/>
                 <a:cs typeface="Amiri" pitchFamily="2" charset="-78"/>
               </a:rPr>
@@ -4848,7 +4848,7 @@
                 <a:solidFill>
                   <a:srgbClr val="FFFFFF"/>
                 </a:solidFill>
-                <a:latin typeface="Calibri" pitchFamily="34" charset="0"/>
+                <a:latin typeface="Amiri" pitchFamily="2" charset="-78"/>
                 <a:ea typeface="Amiri" pitchFamily="2" charset="-78"/>
                 <a:cs typeface="Amiri" pitchFamily="2" charset="-78"/>
               </a:rPr>
@@ -4914,7 +4914,7 @@
                 <a:solidFill>
                   <a:srgbClr val="FFFFFF"/>
                 </a:solidFill>
-                <a:latin typeface="Calibri" pitchFamily="34" charset="0"/>
+                <a:latin typeface="Amiri" pitchFamily="2" charset="-78"/>
                 <a:ea typeface="Amiri" pitchFamily="2" charset="-78"/>
                 <a:cs typeface="Amiri" pitchFamily="2" charset="-78"/>
               </a:rPr>
@@ -4980,7 +4980,7 @@
                 <a:solidFill>
                   <a:srgbClr val="FFFFFF"/>
                 </a:solidFill>
-                <a:latin typeface="Calibri" pitchFamily="34" charset="0"/>
+                <a:latin typeface="Amiri" pitchFamily="2" charset="-78"/>
                 <a:ea typeface="Amiri" pitchFamily="2" charset="-78"/>
                 <a:cs typeface="Amiri" pitchFamily="2" charset="-78"/>
               </a:rPr>
@@ -5046,7 +5046,7 @@
                 <a:solidFill>
                   <a:srgbClr val="FFFFFF"/>
                 </a:solidFill>
-                <a:latin typeface="Calibri" pitchFamily="34" charset="0"/>
+                <a:latin typeface="Amiri" pitchFamily="2" charset="-78"/>
                 <a:ea typeface="Amiri" pitchFamily="2" charset="-78"/>
                 <a:cs typeface="Amiri" pitchFamily="2" charset="-78"/>
               </a:rPr>
@@ -8603,7 +8603,7 @@
                 <a:solidFill>
                   <a:srgbClr val="FFFFFF"/>
                 </a:solidFill>
-                <a:latin typeface="Calibri" pitchFamily="34" charset="0"/>
+                <a:latin typeface="Amiri" pitchFamily="2" charset="-78"/>
                 <a:ea typeface="Amiri" pitchFamily="2" charset="-78"/>
                 <a:cs typeface="Amiri" pitchFamily="2" charset="-78"/>
               </a:rPr>
@@ -8669,7 +8669,7 @@
                 <a:solidFill>
                   <a:srgbClr val="FFFFFF"/>
                 </a:solidFill>
-                <a:latin typeface="Calibri" pitchFamily="34" charset="0"/>
+                <a:latin typeface="Amiri" pitchFamily="2" charset="-78"/>
                 <a:ea typeface="Amiri" pitchFamily="2" charset="-78"/>
                 <a:cs typeface="Amiri" pitchFamily="2" charset="-78"/>
               </a:rPr>
@@ -8735,7 +8735,7 @@
                 <a:solidFill>
                   <a:srgbClr val="FFFFFF"/>
                 </a:solidFill>
-                <a:latin typeface="Calibri" pitchFamily="34" charset="0"/>
+                <a:latin typeface="Amiri" pitchFamily="2" charset="-78"/>
                 <a:ea typeface="Amiri" pitchFamily="2" charset="-78"/>
                 <a:cs typeface="Amiri" pitchFamily="2" charset="-78"/>
               </a:rPr>
@@ -8801,7 +8801,7 @@
                 <a:solidFill>
                   <a:srgbClr val="FFFFFF"/>
                 </a:solidFill>
-                <a:latin typeface="Calibri" pitchFamily="34" charset="0"/>
+                <a:latin typeface="Amiri" pitchFamily="2" charset="-78"/>
                 <a:ea typeface="Amiri" pitchFamily="2" charset="-78"/>
                 <a:cs typeface="Amiri" pitchFamily="2" charset="-78"/>
               </a:rPr>
@@ -9588,7 +9588,7 @@
                 <a:solidFill>
                   <a:srgbClr val="FFFFFF"/>
                 </a:solidFill>
-                <a:latin typeface="Calibri" pitchFamily="34" charset="0"/>
+                <a:latin typeface="Amiri" pitchFamily="2" charset="-78"/>
                 <a:ea typeface="Amiri" pitchFamily="2" charset="-78"/>
                 <a:cs typeface="Amiri" pitchFamily="2" charset="-78"/>
               </a:rPr>
@@ -9654,7 +9654,7 @@
                 <a:solidFill>
                   <a:srgbClr val="FFFFFF"/>
                 </a:solidFill>
-                <a:latin typeface="Calibri" pitchFamily="34" charset="0"/>
+                <a:latin typeface="Amiri" pitchFamily="2" charset="-78"/>
                 <a:ea typeface="Amiri" pitchFamily="2" charset="-78"/>
                 <a:cs typeface="Amiri" pitchFamily="2" charset="-78"/>
               </a:rPr>
@@ -9720,7 +9720,7 @@
                 <a:solidFill>
                   <a:srgbClr val="FFFFFF"/>
                 </a:solidFill>
-                <a:latin typeface="Calibri" pitchFamily="34" charset="0"/>
+                <a:latin typeface="Amiri" pitchFamily="2" charset="-78"/>
                 <a:ea typeface="Amiri" pitchFamily="2" charset="-78"/>
                 <a:cs typeface="Amiri" pitchFamily="2" charset="-78"/>
               </a:rPr>
@@ -9786,7 +9786,7 @@
                 <a:solidFill>
                   <a:srgbClr val="FFFFFF"/>
                 </a:solidFill>
-                <a:latin typeface="Calibri" pitchFamily="34" charset="0"/>
+                <a:latin typeface="Amiri" pitchFamily="2" charset="-78"/>
                 <a:ea typeface="Amiri" pitchFamily="2" charset="-78"/>
                 <a:cs typeface="Amiri" pitchFamily="2" charset="-78"/>
               </a:rPr>
@@ -10573,7 +10573,7 @@
                 <a:solidFill>
                   <a:srgbClr val="FFFFFF"/>
                 </a:solidFill>
-                <a:latin typeface="Calibri" pitchFamily="34" charset="0"/>
+                <a:latin typeface="Amiri" pitchFamily="2" charset="-78"/>
                 <a:ea typeface="Amiri" pitchFamily="2" charset="-78"/>
                 <a:cs typeface="Amiri" pitchFamily="2" charset="-78"/>
               </a:rPr>
@@ -10639,7 +10639,7 @@
                 <a:solidFill>
                   <a:srgbClr val="FFFFFF"/>
                 </a:solidFill>
-                <a:latin typeface="Calibri" pitchFamily="34" charset="0"/>
+                <a:latin typeface="Amiri" pitchFamily="2" charset="-78"/>
                 <a:ea typeface="Amiri" pitchFamily="2" charset="-78"/>
                 <a:cs typeface="Amiri" pitchFamily="2" charset="-78"/>
               </a:rPr>
@@ -10705,7 +10705,7 @@
                 <a:solidFill>
                   <a:srgbClr val="FFFFFF"/>
                 </a:solidFill>
-                <a:latin typeface="Calibri" pitchFamily="34" charset="0"/>
+                <a:latin typeface="Amiri" pitchFamily="2" charset="-78"/>
                 <a:ea typeface="Amiri" pitchFamily="2" charset="-78"/>
                 <a:cs typeface="Amiri" pitchFamily="2" charset="-78"/>
               </a:rPr>
@@ -10771,7 +10771,7 @@
                 <a:solidFill>
                   <a:srgbClr val="FFFFFF"/>
                 </a:solidFill>
-                <a:latin typeface="Calibri" pitchFamily="34" charset="0"/>
+                <a:latin typeface="Amiri" pitchFamily="2" charset="-78"/>
                 <a:ea typeface="Amiri" pitchFamily="2" charset="-78"/>
                 <a:cs typeface="Amiri" pitchFamily="2" charset="-78"/>
               </a:rPr>
